--- a/Concentration2.pptx
+++ b/Concentration2.pptx
@@ -7967,7 +7967,7 @@
           <a:p>
             <a:r>
               <a:rPr lang="en-US" dirty="0"/>
-              <a:t>Concentrations: Five Pillars</a:t>
+              <a:t>Concentrations: Six Pillars</a:t>
             </a:r>
             <a:endParaRPr lang="en-IL" dirty="0"/>
           </a:p>
